--- a/output/presentation/빈틈사이_기능별_기술근거_부록.pptx
+++ b/output/presentation/빈틈사이_기능별_기술근거_부록.pptx
@@ -2,23 +2,23 @@
 <file path=ppt/presentation.xml><?xml version="1.0" encoding="utf-8"?>
 <p:presentation xmlns:p="http://schemas.openxmlformats.org/presentationml/2006/main">
   <p:sldMasterIdLst>
-    <p:sldMasterId xmlns:r="http://schemas.openxmlformats.org/officeDocument/2006/relationships" id="2147483648" r:id="R414ee3f4ff324504"/>
+    <p:sldMasterId xmlns:r="http://schemas.openxmlformats.org/officeDocument/2006/relationships" id="2147483648" r:id="R658f76ff8ba44e32"/>
   </p:sldMasterIdLst>
   <p:notesMasterIdLst>
-    <p:notesMasterId xmlns:r="http://schemas.openxmlformats.org/officeDocument/2006/relationships" r:id="Re66f5300f3fe4dc3"/>
+    <p:notesMasterId xmlns:r="http://schemas.openxmlformats.org/officeDocument/2006/relationships" r:id="R3114e1f060554976"/>
   </p:notesMasterIdLst>
   <p:sldIdLst>
-    <p:sldId xmlns:r="http://schemas.openxmlformats.org/officeDocument/2006/relationships" id="256" r:id="Ra7154cadcf604413"/>
-    <p:sldId xmlns:r="http://schemas.openxmlformats.org/officeDocument/2006/relationships" id="257" r:id="R0d3d0a8e318b4ecf"/>
-    <p:sldId xmlns:r="http://schemas.openxmlformats.org/officeDocument/2006/relationships" id="258" r:id="R4be7323f13c34f1a"/>
-    <p:sldId xmlns:r="http://schemas.openxmlformats.org/officeDocument/2006/relationships" id="259" r:id="R317dff6c6d134121"/>
-    <p:sldId xmlns:r="http://schemas.openxmlformats.org/officeDocument/2006/relationships" id="260" r:id="Rfa1a5dc816e74c8f"/>
-    <p:sldId xmlns:r="http://schemas.openxmlformats.org/officeDocument/2006/relationships" id="261" r:id="R34753c90bb9a487a"/>
-    <p:sldId xmlns:r="http://schemas.openxmlformats.org/officeDocument/2006/relationships" id="262" r:id="R55f3294575ac4bdb"/>
-    <p:sldId xmlns:r="http://schemas.openxmlformats.org/officeDocument/2006/relationships" id="263" r:id="R4df7a01ec8214ad4"/>
-    <p:sldId xmlns:r="http://schemas.openxmlformats.org/officeDocument/2006/relationships" id="264" r:id="Re43ace65c6064a6b"/>
-    <p:sldId xmlns:r="http://schemas.openxmlformats.org/officeDocument/2006/relationships" id="265" r:id="Rfe58148b04da417c"/>
-    <p:sldId xmlns:r="http://schemas.openxmlformats.org/officeDocument/2006/relationships" id="266" r:id="Re45e5faceae84547"/>
+    <p:sldId xmlns:r="http://schemas.openxmlformats.org/officeDocument/2006/relationships" id="256" r:id="Rbda29462f0fe454c"/>
+    <p:sldId xmlns:r="http://schemas.openxmlformats.org/officeDocument/2006/relationships" id="257" r:id="R30aab522f2d4408b"/>
+    <p:sldId xmlns:r="http://schemas.openxmlformats.org/officeDocument/2006/relationships" id="258" r:id="R37d409ec7a16434a"/>
+    <p:sldId xmlns:r="http://schemas.openxmlformats.org/officeDocument/2006/relationships" id="259" r:id="Rbd2bfa63a66549a6"/>
+    <p:sldId xmlns:r="http://schemas.openxmlformats.org/officeDocument/2006/relationships" id="260" r:id="R34e562e1439e4f2a"/>
+    <p:sldId xmlns:r="http://schemas.openxmlformats.org/officeDocument/2006/relationships" id="261" r:id="R871b845aac4f4fd1"/>
+    <p:sldId xmlns:r="http://schemas.openxmlformats.org/officeDocument/2006/relationships" id="262" r:id="R542474f612444875"/>
+    <p:sldId xmlns:r="http://schemas.openxmlformats.org/officeDocument/2006/relationships" id="263" r:id="Rb58dd8fe631c4b22"/>
+    <p:sldId xmlns:r="http://schemas.openxmlformats.org/officeDocument/2006/relationships" id="264" r:id="R7d9d098d34844fd0"/>
+    <p:sldId xmlns:r="http://schemas.openxmlformats.org/officeDocument/2006/relationships" id="265" r:id="R931a8fbdad314c05"/>
+    <p:sldId xmlns:r="http://schemas.openxmlformats.org/officeDocument/2006/relationships" id="266" r:id="R43b5ffbbf398497a"/>
   </p:sldIdLst>
   <p:sldSz cx="13716000" cy="7715250"/>
   <p:notesSz cx="6858000" cy="9144000"/>
@@ -460,6 +460,16 @@
               <a:t>- docs/한재웅/부록 적용/mindreport_langgraph_flow.md</a:t>
             </a:r>
           </a:p>
+          <a:p xmlns:a="http://schemas.openxmlformats.org/drawingml/2006/main">
+            <a:r>
+              <a:t>- app/backend/mindreport/services/graph_flow.py</a:t>
+            </a:r>
+          </a:p>
+          <a:p xmlns:a="http://schemas.openxmlformats.org/drawingml/2006/main">
+            <a:r>
+              <a:t>- app/backend/mindreport/services/validation_agent.py</a:t>
+            </a:r>
+          </a:p>
         </p:txBody>
       </p:sp>
       <p:sp>
@@ -532,7 +542,22 @@
           </a:p>
           <a:p xmlns:a="http://schemas.openxmlformats.org/drawingml/2006/main">
             <a:r>
-              <a:t>- docs/한재웅/부록 적용/weather_analysis_system_flow.md</a:t>
+              <a:t>- app/backend/myweather/agent.py</a:t>
+            </a:r>
+          </a:p>
+          <a:p xmlns:a="http://schemas.openxmlformats.org/drawingml/2006/main">
+            <a:r>
+              <a:t>- app/backend/myweather/services.py</a:t>
+            </a:r>
+          </a:p>
+          <a:p xmlns:a="http://schemas.openxmlformats.org/drawingml/2006/main">
+            <a:r>
+              <a:t>- app/backend/myweather/service/weather_index_service.py</a:t>
+            </a:r>
+          </a:p>
+          <a:p xmlns:a="http://schemas.openxmlformats.org/drawingml/2006/main">
+            <a:r>
+              <a:t>- app/backend/myweather/service/user_profile_service.py</a:t>
             </a:r>
           </a:p>
         </p:txBody>
@@ -607,7 +632,27 @@
           </a:p>
           <a:p xmlns:a="http://schemas.openxmlformats.org/drawingml/2006/main">
             <a:r>
-              <a:t>- docs/한재웅/부록 적용/weather_analysis_system_flow.md</a:t>
+              <a:t>- app/backend/myweather/agent.py</a:t>
+            </a:r>
+          </a:p>
+          <a:p xmlns:a="http://schemas.openxmlformats.org/drawingml/2006/main">
+            <a:r>
+              <a:t>- app/backend/myweather/services.py</a:t>
+            </a:r>
+          </a:p>
+          <a:p xmlns:a="http://schemas.openxmlformats.org/drawingml/2006/main">
+            <a:r>
+              <a:t>- app/backend/myweather/service/region_service.py</a:t>
+            </a:r>
+          </a:p>
+          <a:p xmlns:a="http://schemas.openxmlformats.org/drawingml/2006/main">
+            <a:r>
+              <a:t>- app/backend/myweather/service/weather_index_service.py</a:t>
+            </a:r>
+          </a:p>
+          <a:p xmlns:a="http://schemas.openxmlformats.org/drawingml/2006/main">
+            <a:r>
+              <a:t>- app/backend/myweather/service/insight_cache_service.py</a:t>
             </a:r>
           </a:p>
         </p:txBody>
@@ -682,7 +727,17 @@
           </a:p>
           <a:p xmlns:a="http://schemas.openxmlformats.org/drawingml/2006/main">
             <a:r>
-              <a:t>- docs/한재웅/부록 적용/mindreport_emotion_scoring_method.md</a:t>
+              <a:t>- app/backend/mindreport/constants.py</a:t>
+            </a:r>
+          </a:p>
+          <a:p xmlns:a="http://schemas.openxmlformats.org/drawingml/2006/main">
+            <a:r>
+              <a:t>- app/backend/mindreport/services/scoring.py</a:t>
+            </a:r>
+          </a:p>
+          <a:p xmlns:a="http://schemas.openxmlformats.org/drawingml/2006/main">
+            <a:r>
+              <a:t>- app/backend/mindreport/services/emotion_flow.py</a:t>
             </a:r>
           </a:p>
         </p:txBody>
@@ -757,7 +812,17 @@
           </a:p>
           <a:p xmlns:a="http://schemas.openxmlformats.org/drawingml/2006/main">
             <a:r>
-              <a:t>- docs/한재웅/부록 적용/mindreport_langgraph_flow.md</a:t>
+              <a:t>- app/backend/mindreport/services/cause_keyword_agent.py</a:t>
+            </a:r>
+          </a:p>
+          <a:p xmlns:a="http://schemas.openxmlformats.org/drawingml/2006/main">
+            <a:r>
+              <a:t>- app/backend/mindreport/services/narrative_action_agent.py</a:t>
+            </a:r>
+          </a:p>
+          <a:p xmlns:a="http://schemas.openxmlformats.org/drawingml/2006/main">
+            <a:r>
+              <a:t>- app/backend/mindreport/services/validation_agent.py</a:t>
             </a:r>
           </a:p>
         </p:txBody>
@@ -832,11 +897,6 @@
           </a:p>
           <a:p xmlns:a="http://schemas.openxmlformats.org/drawingml/2006/main">
             <a:r>
-              <a:t>- docs/한재웅/부록 적용/mbti_system_flow.md</a:t>
-            </a:r>
-          </a:p>
-          <a:p xmlns:a="http://schemas.openxmlformats.org/drawingml/2006/main">
-            <a:r>
               <a:t>- app/backend/chat/views.py</a:t>
             </a:r>
           </a:p>
@@ -848,11 +908,6 @@
           <a:p xmlns:a="http://schemas.openxmlformats.org/drawingml/2006/main">
             <a:r>
               <a:t>- ai/agents/nodes.py</a:t>
-            </a:r>
-          </a:p>
-          <a:p xmlns:a="http://schemas.openxmlformats.org/drawingml/2006/main">
-            <a:r>
-              <a:t>- app/backend/mbti/services/opening_rules.py</a:t>
             </a:r>
           </a:p>
           <a:p xmlns:a="http://schemas.openxmlformats.org/drawingml/2006/main">
@@ -932,7 +987,7 @@
           </a:p>
           <a:p xmlns:a="http://schemas.openxmlformats.org/drawingml/2006/main">
             <a:r>
-              <a:t>- docs/한재웅/부록 적용/mbti_system_flow.md</a:t>
+              <a:t>- app/backend/mbti/services/opening_rules.py</a:t>
             </a:r>
           </a:p>
           <a:p xmlns:a="http://schemas.openxmlformats.org/drawingml/2006/main">
@@ -1022,6 +1077,11 @@
           </a:p>
           <a:p xmlns:a="http://schemas.openxmlformats.org/drawingml/2006/main">
             <a:r>
+              <a:t>- app/backend/mbti/constants.py</a:t>
+            </a:r>
+          </a:p>
+          <a:p xmlns:a="http://schemas.openxmlformats.org/drawingml/2006/main">
+            <a:r>
               <a:t>- app/backend/mbti/services/response_scoring.py</a:t>
             </a:r>
           </a:p>
@@ -1033,11 +1093,6 @@
           <a:p xmlns:a="http://schemas.openxmlformats.org/drawingml/2006/main">
             <a:r>
               <a:t>- app/backend/mbti/services/reports.py</a:t>
-            </a:r>
-          </a:p>
-          <a:p xmlns:a="http://schemas.openxmlformats.org/drawingml/2006/main">
-            <a:r>
-              <a:t>- app/backend/mbti/constants.py</a:t>
             </a:r>
           </a:p>
         </p:txBody>
@@ -1112,17 +1167,22 @@
           </a:p>
           <a:p xmlns:a="http://schemas.openxmlformats.org/drawingml/2006/main">
             <a:r>
-              <a:t>- docs/한재웅/부록 적용/book_recommendation_system_flow.md</a:t>
-            </a:r>
-          </a:p>
-          <a:p xmlns:a="http://schemas.openxmlformats.org/drawingml/2006/main">
-            <a:r>
               <a:t>- app/backend/mybook/agent.py</a:t>
             </a:r>
           </a:p>
           <a:p xmlns:a="http://schemas.openxmlformats.org/drawingml/2006/main">
             <a:r>
+              <a:t>- app/backend/mybook/constants.py</a:t>
+            </a:r>
+          </a:p>
+          <a:p xmlns:a="http://schemas.openxmlformats.org/drawingml/2006/main">
+            <a:r>
               <a:t>- app/backend/mybook/services/profile_service.py</a:t>
+            </a:r>
+          </a:p>
+          <a:p xmlns:a="http://schemas.openxmlformats.org/drawingml/2006/main">
+            <a:r>
+              <a:t>- app/backend/mybook/services/recommendation_service.py</a:t>
             </a:r>
           </a:p>
         </p:txBody>
@@ -1202,17 +1262,17 @@
           </a:p>
           <a:p xmlns:a="http://schemas.openxmlformats.org/drawingml/2006/main">
             <a:r>
+              <a:t>- app/backend/mybook/constants.py</a:t>
+            </a:r>
+          </a:p>
+          <a:p xmlns:a="http://schemas.openxmlformats.org/drawingml/2006/main">
+            <a:r>
               <a:t>- app/backend/mybook/services/ranking_service.py</a:t>
             </a:r>
           </a:p>
           <a:p xmlns:a="http://schemas.openxmlformats.org/drawingml/2006/main">
             <a:r>
               <a:t>- app/backend/mybook/services/recommendation_service.py</a:t>
-            </a:r>
-          </a:p>
-          <a:p xmlns:a="http://schemas.openxmlformats.org/drawingml/2006/main">
-            <a:r>
-              <a:t>- app/backend/mybook/constants.py</a:t>
             </a:r>
           </a:p>
         </p:txBody>
@@ -1365,7 +1425,7 @@
   </p:cSld>
   <p:clrMap bg1="lt1" tx1="dk1" bg2="lt2" tx2="dk2" accent1="accent1" accent2="accent2" accent3="accent3" accent4="accent4" accent5="accent5" accent6="accent6" hlink="hlink" folHlink="folHlink"/>
   <p:sldLayoutIdLst>
-    <p:sldLayoutId xmlns:r="http://schemas.openxmlformats.org/officeDocument/2006/relationships" id="2147483649" r:id="R1c78715a663c4e4d"/>
+    <p:sldLayoutId xmlns:r="http://schemas.openxmlformats.org/officeDocument/2006/relationships" id="2147483649" r:id="R61feb55a20204053"/>
   </p:sldLayoutIdLst>
   <p:txStyles>
     <p:titleStyle>
@@ -1968,7 +2028,18 @@
                 <a:ea typeface="Noto Sans KR"/>
                 <a:cs typeface="Noto Sans KR"/>
               </a:rPr>
-              <a:t>TECHNICAL EVIDENCE · 마음리포트 · 멀티에이전트 구조</a:t>
+              <a:t>APPENDIX</a:t>
+            </a:r>
+            <a:r>
+              <a:rPr sz="1350" b="1">
+                <a:solidFill>
+                  <a:srgbClr val="FF7D78"/>
+                </a:solidFill>
+                <a:latin typeface="Noto Sans KR"/>
+                <a:ea typeface="Noto Sans KR"/>
+                <a:cs typeface="Noto Sans KR"/>
+              </a:rPr>
+              <a:t> · 마음리포트 · 멀티에이전트 구조</a:t>
             </a:r>
           </a:p>
         </p:txBody>
@@ -4507,7 +4578,7 @@
                 <a:ea typeface="Noto Sans KR"/>
                 <a:cs typeface="Noto Sans KR"/>
               </a:rPr>
-              <a:t>판단 성격이 다른 네 단계</a:t>
+              <a:t>AI와 규칙의 역할 분리</a:t>
             </a:r>
           </a:p>
         </p:txBody>
@@ -4569,7 +4640,7 @@
                 <a:ea typeface="Noto Sans KR"/>
                 <a:cs typeface="Noto Sans KR"/>
               </a:rPr>
-              <a:t>감정 분류, 원인 추출·분류, 근거 기반 서술, 최종 검증에 AI를 각각 분리 적용한다.</a:t>
+              <a:t>AI는 감정 분류·원인 추출과 분류·근거 서술에 쓰고, 최종 검증은 명시된 서버 규칙으로 분리한다.</a:t>
             </a:r>
           </a:p>
         </p:txBody>
@@ -4788,7 +4859,7 @@
                 <a:ea typeface="Noto Sans KR"/>
                 <a:cs typeface="Noto Sans KR"/>
               </a:rPr>
-              <a:t>각 에이전트는 앞 단계의 검증된 출력만 이어받고, 검증 결과가 통과·재실행·안전·폴백 경로를 결정한다.</a:t>
+              <a:t>각 노드는 앞 단계의 계약된 출력을 State에 누적하고, 검증 결과가 통과·재실행·안전·폴백 경로를 결정한다.</a:t>
             </a:r>
           </a:p>
         </p:txBody>
@@ -5044,7 +5115,7 @@
         </p:spPr>
         <p:txBody>
           <a:bodyPr xmlns:a="http://schemas.openxmlformats.org/drawingml/2006/main" wrap="square" lIns="95250" tIns="57150" rIns="95250" bIns="57150" anchor="ctr">
-            <a:normAutofit fontScale="92897"/>
+            <a:normAutofit fontScale="91068"/>
           </a:bodyPr>
           <a:lstStyle xmlns:a="http://schemas.openxmlformats.org/drawingml/2006/main"/>
           <a:p xmlns:a="http://schemas.openxmlformats.org/drawingml/2006/main">
@@ -5071,7 +5142,7 @@
                 <a:ea typeface="Noto Sans KR"/>
                 <a:cs typeface="Noto Sans KR"/>
               </a:rPr>
-              <a:t>핵심: 생성 능력보다 ‘검증 가능한 협업 구조’에 AI를 배치</a:t>
+              <a:t>핵심: AI 생성과 규칙 검증을 분리한 추적 가능한 협업 구조</a:t>
             </a:r>
           </a:p>
         </p:txBody>
@@ -5162,7 +5233,18 @@
                 <a:ea typeface="Noto Sans KR"/>
                 <a:cs typeface="Noto Sans KR"/>
               </a:rPr>
-              <a:t>TECHNICAL EVIDENCE · 날씨 분석</a:t>
+              <a:t>APPENDIX</a:t>
+            </a:r>
+            <a:r>
+              <a:rPr sz="1350" b="1">
+                <a:solidFill>
+                  <a:srgbClr val="65C8D9"/>
+                </a:solidFill>
+                <a:latin typeface="Noto Sans KR"/>
+                <a:ea typeface="Noto Sans KR"/>
+                <a:cs typeface="Noto Sans KR"/>
+              </a:rPr>
+              <a:t> · 날씨 분석</a:t>
             </a:r>
           </a:p>
         </p:txBody>
@@ -6385,7 +6467,7 @@
                 <a:ea typeface="Noto Sans KR"/>
                 <a:cs typeface="Noto Sans KR"/>
               </a:rPr>
-              <a:t>마이페이지의 생활 추천 영역에서 현재 상황과 사용자 취미를 연결한다. 감정은 조언의 강도와 톤을 조절하는 보조 맥락으로만 사용한다.</a:t>
+              <a:t>마이페이지 생활 추천에서 현재 상황과 취미를 연결한다. 감정은 행동 제안의 보조 맥락이며 기상 사실에는 영향을 주지 않는다.</a:t>
             </a:r>
           </a:p>
         </p:txBody>
@@ -6920,7 +7002,7 @@
                 <a:ea typeface="Noto Sans KR"/>
                 <a:cs typeface="Noto Sans KR"/>
               </a:rPr>
-              <a:t>기상청 실황·예보·특보·자외선 데이터를 통합하고, 체감온도·불쾌지수·식중독지수는 서버의 명시된 식으로 확정한다.</a:t>
+              <a:t>기상청 실황·예보·특보·자외선을 통합한다. 체감·불쾌지수는 서버 산식, 식중독은 공식값 우선·없으면 참고식으로 계산한다.</a:t>
             </a:r>
           </a:p>
         </p:txBody>
@@ -7139,7 +7221,7 @@
                 <a:ea typeface="Noto Sans KR"/>
                 <a:cs typeface="Noto Sans KR"/>
               </a:rPr>
-              <a:t>AI는 위치·당일 감정·활동형 취미와 최신 외출 맥락을 결합해 실천 가능한 행동과 취미 팁을 작성한다.</a:t>
+              <a:t>AI는 위치·당일 대표 감정·이번 회차 선택 취미와 최신 외출 맥락을 결합해 실천 가능한 행동과 취미 팁을 작성한다.</a:t>
             </a:r>
           </a:p>
         </p:txBody>
@@ -7294,7 +7376,18 @@
                 <a:ea typeface="Noto Sans KR"/>
                 <a:cs typeface="Noto Sans KR"/>
               </a:rPr>
-              <a:t>TECHNICAL EVIDENCE · 날씨 분석</a:t>
+              <a:t>APPENDIX</a:t>
+            </a:r>
+            <a:r>
+              <a:rPr sz="1350" b="1">
+                <a:solidFill>
+                  <a:srgbClr val="65C8D9"/>
+                </a:solidFill>
+                <a:latin typeface="Noto Sans KR"/>
+                <a:ea typeface="Noto Sans KR"/>
+                <a:cs typeface="Noto Sans KR"/>
+              </a:rPr>
+              <a:t> · 날씨 분석</a:t>
             </a:r>
           </a:p>
         </p:txBody>
@@ -7969,7 +8062,7 @@
                 <a:ea typeface="Noto Sans KR"/>
                 <a:cs typeface="Noto Sans KR"/>
               </a:rPr>
-              <a:t>lat/lon → 행정구역 + 기상청 예보 격자 nx, ny</a:t>
+              <a:t>lat/lon → 최근접 지원 지역 + 기상청 격자 nx, ny</a:t>
             </a:r>
           </a:p>
         </p:txBody>
@@ -8357,7 +8450,7 @@
                 <a:ea typeface="Noto Sans KR"/>
                 <a:cs typeface="Noto Sans KR"/>
               </a:rPr>
-              <a:t>체감온도·불쾌지수·식중독지수를 명시된 산식으로 확정</a:t>
+              <a:t>체감·불쾌지수 산식 · 식중독 공식값 우선/없으면 참고식</a:t>
             </a:r>
           </a:p>
         </p:txBody>
@@ -8551,7 +8644,7 @@
                 <a:ea typeface="Noto Sans KR"/>
                 <a:cs typeface="Noto Sans KR"/>
               </a:rPr>
-              <a:t>Tavily 외출 스니펫 + 사용자의 활동형 취미·당일 지배 감정</a:t>
+              <a:t>Tavily 외출 스니펫 + 이번 회차 취미·당일 대표 감정</a:t>
             </a:r>
           </a:p>
         </p:txBody>
@@ -8939,7 +9032,7 @@
                 <a:ea typeface="Noto Sans KR"/>
                 <a:cs typeface="Noto Sans KR"/>
               </a:rPr>
-              <a:t>표현 필터로 문체 정제 · 1시간 캐시 후 날씨 패널에 전달</a:t>
+              <a:t>표현 필터 · 정상 1시간/AI 실패 60초 캐시 후 전달</a:t>
             </a:r>
           </a:p>
         </p:txBody>
@@ -9125,7 +9218,7 @@
                 <a:ea typeface="Noto Sans KR"/>
                 <a:cs typeface="Noto Sans KR"/>
               </a:rPr>
-              <a:t>→ 서버 공식</a:t>
+              <a:t>→ 산식/공식값</a:t>
             </a:r>
           </a:p>
           <a:p xmlns:a="http://schemas.openxmlformats.org/drawingml/2006/main">
@@ -9152,7 +9245,7 @@
                 <a:ea typeface="Noto Sans KR"/>
                 <a:cs typeface="Noto Sans KR"/>
               </a:rPr>
-              <a:t>→ 확정 지수</a:t>
+              <a:t>→ 생활 지수</a:t>
             </a:r>
           </a:p>
         </p:txBody>
@@ -9900,7 +9993,7 @@
                 <a:ea typeface="Noto Sans KR"/>
                 <a:cs typeface="Noto Sans KR"/>
               </a:rPr>
-              <a:t>체감온도·불쾌지수·식중독지수는 서버 산식으로 먼저 확정한다. AI는 그 값을 입력으로만 받아 설명한다.</a:t>
+              <a:t>체감·불쾌지수는 서버 산식으로 계산하고 식중독은 공식값을 우선한다. AI는 확정값만 설명한다.</a:t>
             </a:r>
           </a:p>
         </p:txBody>
@@ -10274,7 +10367,18 @@
                 <a:ea typeface="Noto Sans KR"/>
                 <a:cs typeface="Noto Sans KR"/>
               </a:rPr>
-              <a:t>TECHNICAL EVIDENCE · 마음리포트 · 리포트 생성 규칙과 원리</a:t>
+              <a:t>APPENDIX</a:t>
+            </a:r>
+            <a:r>
+              <a:rPr sz="1350" b="1">
+                <a:solidFill>
+                  <a:srgbClr val="FF7D78"/>
+                </a:solidFill>
+                <a:latin typeface="Noto Sans KR"/>
+                <a:ea typeface="Noto Sans KR"/>
+                <a:cs typeface="Noto Sans KR"/>
+              </a:rPr>
+              <a:t> · 마음리포트 · 리포트 생성 규칙과 원리</a:t>
             </a:r>
           </a:p>
         </p:txBody>
@@ -11663,7 +11767,7 @@
                 <a:ea typeface="Noto Sans KR"/>
                 <a:cs typeface="Noto Sans KR"/>
               </a:rPr>
-              <a:t>0~100 점수 환산</a:t>
+              <a:t>감정 점수 가중합</a:t>
             </a:r>
           </a:p>
         </p:txBody>
@@ -11725,7 +11829,7 @@
                 <a:ea typeface="Noto Sans KR"/>
                 <a:cs typeface="Noto Sans KR"/>
               </a:rPr>
-              <a:t>기쁨×100 + 일반×50 + 슬픔×25 + 분노×0</a:t>
+              <a:t>기쁨×70 + 일반×50 + 슬픔×40 + 분노×30</a:t>
             </a:r>
           </a:p>
         </p:txBody>
@@ -11919,7 +12023,7 @@
                 <a:ea typeface="Noto Sans KR"/>
                 <a:cs typeface="Noto Sans KR"/>
               </a:rPr>
-              <a:t>서로 다른 기록일 3일 이상일 때 상승·하락·변동·유지 판정</a:t>
+              <a:t>서로 다른 기록일 3일 이상이면 변동을 먼저 확인한 뒤 상승·하락·유지 판정</a:t>
             </a:r>
           </a:p>
         </p:txBody>
@@ -12264,7 +12368,7 @@
         </p:spPr>
         <p:txBody>
           <a:bodyPr xmlns:a="http://schemas.openxmlformats.org/drawingml/2006/main" wrap="square" lIns="38100" tIns="19050" rIns="38100" bIns="19050" anchor="ctr">
-            <a:normAutofit fontScale="96512"/>
+            <a:normAutofit fontScale="83772"/>
           </a:bodyPr>
           <a:lstStyle xmlns:a="http://schemas.openxmlformats.org/drawingml/2006/main"/>
           <a:p xmlns:a="http://schemas.openxmlformats.org/drawingml/2006/main">
@@ -12291,6 +12395,92 @@
                 <a:ea typeface="Noto Sans KR"/>
                 <a:cs typeface="Noto Sans KR"/>
               </a:rPr>
+              <a:t>변동(우선)</a:t>
+            </a:r>
+          </a:p>
+          <a:p xmlns:a="http://schemas.openxmlformats.org/drawingml/2006/main">
+            <a:pPr algn="ctr">
+              <a:lnSpc>
+                <a:spcPct val="105000"/>
+              </a:lnSpc>
+              <a:buNone/>
+              <a:defRPr sz="1088" b="0">
+                <a:solidFill>
+                  <a:srgbClr val="FFF5EA"/>
+                </a:solidFill>
+                <a:latin typeface="Noto Sans KR"/>
+                <a:ea typeface="Noto Sans KR"/>
+                <a:cs typeface="Noto Sans KR"/>
+              </a:defRPr>
+            </a:pPr>
+            <a:r>
+              <a:rPr sz="1088" b="0">
+                <a:solidFill>
+                  <a:srgbClr val="FFF5EA"/>
+                </a:solidFill>
+                <a:latin typeface="Noto Sans KR"/>
+                <a:ea typeface="Noto Sans KR"/>
+                <a:cs typeface="Noto Sans KR"/>
+              </a:rPr>
+              <a:t>표준편차 16 이상 + 방향 전환</a:t>
+            </a:r>
+          </a:p>
+          <a:p xmlns:a="http://schemas.openxmlformats.org/drawingml/2006/main">
+            <a:pPr algn="ctr">
+              <a:lnSpc>
+                <a:spcPct val="105000"/>
+              </a:lnSpc>
+              <a:buNone/>
+              <a:defRPr sz="1088" b="0">
+                <a:solidFill>
+                  <a:srgbClr val="FFF5EA"/>
+                </a:solidFill>
+                <a:latin typeface="Noto Sans KR"/>
+                <a:ea typeface="Noto Sans KR"/>
+                <a:cs typeface="Noto Sans KR"/>
+              </a:defRPr>
+            </a:pPr>
+            <a:r>
+              <a:rPr sz="1088" b="0">
+                <a:solidFill>
+                  <a:srgbClr val="FFF5EA"/>
+                </a:solidFill>
+                <a:latin typeface="Noto Sans KR"/>
+                <a:ea typeface="Noto Sans KR"/>
+                <a:cs typeface="Noto Sans KR"/>
+              </a:rPr>
+              <a:t>또는 ±18 이상 급등락 공존</a:t>
+            </a:r>
+          </a:p>
+          <a:p xmlns:a="http://schemas.openxmlformats.org/drawingml/2006/main">
+            <a:r>
+              <a:t/>
+            </a:r>
+          </a:p>
+          <a:p xmlns:a="http://schemas.openxmlformats.org/drawingml/2006/main">
+            <a:pPr algn="ctr">
+              <a:lnSpc>
+                <a:spcPct val="105000"/>
+              </a:lnSpc>
+              <a:buNone/>
+              <a:defRPr sz="1088" b="0">
+                <a:solidFill>
+                  <a:srgbClr val="FFF5EA"/>
+                </a:solidFill>
+                <a:latin typeface="Noto Sans KR"/>
+                <a:ea typeface="Noto Sans KR"/>
+                <a:cs typeface="Noto Sans KR"/>
+              </a:defRPr>
+            </a:pPr>
+            <a:r>
+              <a:rPr sz="1088" b="0">
+                <a:solidFill>
+                  <a:srgbClr val="FFF5EA"/>
+                </a:solidFill>
+                <a:latin typeface="Noto Sans KR"/>
+                <a:ea typeface="Noto Sans KR"/>
+                <a:cs typeface="Noto Sans KR"/>
+              </a:rPr>
               <a:t>상승/하락</a:t>
             </a:r>
           </a:p>
@@ -12318,93 +12508,7 @@
                 <a:ea typeface="Noto Sans KR"/>
                 <a:cs typeface="Noto Sans KR"/>
               </a:rPr>
-              <a:t>전후 평균 ±8 또는</a:t>
-            </a:r>
-          </a:p>
-          <a:p xmlns:a="http://schemas.openxmlformats.org/drawingml/2006/main">
-            <a:pPr algn="ctr">
-              <a:lnSpc>
-                <a:spcPct val="105000"/>
-              </a:lnSpc>
-              <a:buNone/>
-              <a:defRPr sz="1088" b="0">
-                <a:solidFill>
-                  <a:srgbClr val="FFF5EA"/>
-                </a:solidFill>
-                <a:latin typeface="Noto Sans KR"/>
-                <a:ea typeface="Noto Sans KR"/>
-                <a:cs typeface="Noto Sans KR"/>
-              </a:defRPr>
-            </a:pPr>
-            <a:r>
-              <a:rPr sz="1088" b="0">
-                <a:solidFill>
-                  <a:srgbClr val="FFF5EA"/>
-                </a:solidFill>
-                <a:latin typeface="Noto Sans KR"/>
-                <a:ea typeface="Noto Sans KR"/>
-                <a:cs typeface="Noto Sans KR"/>
-              </a:rPr>
-              <a:t>첫날·마지막 날 ±12</a:t>
-            </a:r>
-          </a:p>
-          <a:p xmlns:a="http://schemas.openxmlformats.org/drawingml/2006/main">
-            <a:r>
-              <a:t/>
-            </a:r>
-          </a:p>
-          <a:p xmlns:a="http://schemas.openxmlformats.org/drawingml/2006/main">
-            <a:pPr algn="ctr">
-              <a:lnSpc>
-                <a:spcPct val="105000"/>
-              </a:lnSpc>
-              <a:buNone/>
-              <a:defRPr sz="1088" b="0">
-                <a:solidFill>
-                  <a:srgbClr val="FFF5EA"/>
-                </a:solidFill>
-                <a:latin typeface="Noto Sans KR"/>
-                <a:ea typeface="Noto Sans KR"/>
-                <a:cs typeface="Noto Sans KR"/>
-              </a:defRPr>
-            </a:pPr>
-            <a:r>
-              <a:rPr sz="1088" b="0">
-                <a:solidFill>
-                  <a:srgbClr val="FFF5EA"/>
-                </a:solidFill>
-                <a:latin typeface="Noto Sans KR"/>
-                <a:ea typeface="Noto Sans KR"/>
-                <a:cs typeface="Noto Sans KR"/>
-              </a:rPr>
-              <a:t>변동</a:t>
-            </a:r>
-          </a:p>
-          <a:p xmlns:a="http://schemas.openxmlformats.org/drawingml/2006/main">
-            <a:pPr algn="ctr">
-              <a:lnSpc>
-                <a:spcPct val="105000"/>
-              </a:lnSpc>
-              <a:buNone/>
-              <a:defRPr sz="1088" b="0">
-                <a:solidFill>
-                  <a:srgbClr val="FFF5EA"/>
-                </a:solidFill>
-                <a:latin typeface="Noto Sans KR"/>
-                <a:ea typeface="Noto Sans KR"/>
-                <a:cs typeface="Noto Sans KR"/>
-              </a:defRPr>
-            </a:pPr>
-            <a:r>
-              <a:rPr sz="1088" b="0">
-                <a:solidFill>
-                  <a:srgbClr val="FFF5EA"/>
-                </a:solidFill>
-                <a:latin typeface="Noto Sans KR"/>
-                <a:ea typeface="Noto Sans KR"/>
-                <a:cs typeface="Noto Sans KR"/>
-              </a:rPr>
-              <a:t>표준편차 16 + 방향 전환</a:t>
+              <a:t>전후 평균 ±8 또는 순변화 ±12</a:t>
             </a:r>
           </a:p>
         </p:txBody>
@@ -13313,7 +13417,18 @@
                 <a:ea typeface="Noto Sans KR"/>
                 <a:cs typeface="Noto Sans KR"/>
               </a:rPr>
-              <a:t>TECHNICAL EVIDENCE · 마음리포트 · 리포트 생성 규칙과 원리</a:t>
+              <a:t>APPENDIX</a:t>
+            </a:r>
+            <a:r>
+              <a:rPr sz="1350" b="1">
+                <a:solidFill>
+                  <a:srgbClr val="FF7D78"/>
+                </a:solidFill>
+                <a:latin typeface="Noto Sans KR"/>
+                <a:ea typeface="Noto Sans KR"/>
+                <a:cs typeface="Noto Sans KR"/>
+              </a:rPr>
+              <a:t> · 마음리포트 · 리포트 생성 규칙과 원리</a:t>
             </a:r>
           </a:p>
         </p:txBody>
@@ -16305,7 +16420,18 @@
                 <a:ea typeface="Noto Sans KR"/>
                 <a:cs typeface="Noto Sans KR"/>
               </a:rPr>
-              <a:t>TECHNICAL EVIDENCE · MBTI 분석</a:t>
+              <a:t>APPENDIX</a:t>
+            </a:r>
+            <a:r>
+              <a:rPr sz="1350" b="1">
+                <a:solidFill>
+                  <a:srgbClr val="B882F2"/>
+                </a:solidFill>
+                <a:latin typeface="Noto Sans KR"/>
+                <a:ea typeface="Noto Sans KR"/>
+                <a:cs typeface="Noto Sans KR"/>
+              </a:rPr>
+              <a:t> · MBTI 분석</a:t>
             </a:r>
           </a:p>
         </p:txBody>
@@ -18437,7 +18563,18 @@
                 <a:ea typeface="Noto Sans KR"/>
                 <a:cs typeface="Noto Sans KR"/>
               </a:rPr>
-              <a:t>TECHNICAL EVIDENCE · MBTI 분석</a:t>
+              <a:t>APPENDIX</a:t>
+            </a:r>
+            <a:r>
+              <a:rPr sz="1350" b="1">
+                <a:solidFill>
+                  <a:srgbClr val="B882F2"/>
+                </a:solidFill>
+                <a:latin typeface="Noto Sans KR"/>
+                <a:ea typeface="Noto Sans KR"/>
+                <a:cs typeface="Noto Sans KR"/>
+              </a:rPr>
+              <a:t> · MBTI 분석</a:t>
             </a:r>
           </a:p>
         </p:txBody>
@@ -21386,7 +21523,18 @@
                 <a:ea typeface="Noto Sans KR"/>
                 <a:cs typeface="Noto Sans KR"/>
               </a:rPr>
-              <a:t>TECHNICAL EVIDENCE · MBTI 분석</a:t>
+              <a:t>APPENDIX</a:t>
+            </a:r>
+            <a:r>
+              <a:rPr sz="1350" b="1">
+                <a:solidFill>
+                  <a:srgbClr val="B882F2"/>
+                </a:solidFill>
+                <a:latin typeface="Noto Sans KR"/>
+                <a:ea typeface="Noto Sans KR"/>
+                <a:cs typeface="Noto Sans KR"/>
+              </a:rPr>
+              <a:t> · MBTI 분석</a:t>
             </a:r>
           </a:p>
         </p:txBody>
@@ -24045,7 +24193,18 @@
                 <a:ea typeface="Noto Sans KR"/>
                 <a:cs typeface="Noto Sans KR"/>
               </a:rPr>
-              <a:t>TECHNICAL EVIDENCE · AI 도서 추천</a:t>
+              <a:t>APPENDIX</a:t>
+            </a:r>
+            <a:r>
+              <a:rPr sz="1350" b="1">
+                <a:solidFill>
+                  <a:srgbClr val="F7B95B"/>
+                </a:solidFill>
+                <a:latin typeface="Noto Sans KR"/>
+                <a:ea typeface="Noto Sans KR"/>
+                <a:cs typeface="Noto Sans KR"/>
+              </a:rPr>
+              <a:t> · AI 도서 추천</a:t>
             </a:r>
           </a:p>
         </p:txBody>
@@ -24958,7 +25117,7 @@
                 <a:ea typeface="Noto Sans KR"/>
                 <a:cs typeface="Noto Sans KR"/>
               </a:rPr>
-              <a:t>Kakao 후보 3권과</a:t>
+              <a:t>테마별 최종 1권 · 총 3권</a:t>
             </a:r>
           </a:p>
           <a:p xmlns:a="http://schemas.openxmlformats.org/drawingml/2006/main">
@@ -25268,7 +25427,7 @@
                 <a:ea typeface="Noto Sans KR"/>
                 <a:cs typeface="Noto Sans KR"/>
               </a:rPr>
-              <a:t>마이페이지에서 하루 단위 추천을 제공해 자기이해를 생활 속 선택으로 연결한다. 프로필이 바뀌면 관련 테마만 다시 생성한다.</a:t>
+              <a:t>마이페이지에서 하루 단위 추천을 제공한다. 감정·관심사·취미 중 한 근거만 바뀌면 해당 테마만 다시 생성한다.</a:t>
             </a:r>
           </a:p>
         </p:txBody>
@@ -26177,7 +26336,18 @@
                 <a:ea typeface="Noto Sans KR"/>
                 <a:cs typeface="Noto Sans KR"/>
               </a:rPr>
-              <a:t>TECHNICAL EVIDENCE · AI 도서 추천</a:t>
+              <a:t>APPENDIX</a:t>
+            </a:r>
+            <a:r>
+              <a:rPr sz="1350" b="1">
+                <a:solidFill>
+                  <a:srgbClr val="F7B95B"/>
+                </a:solidFill>
+                <a:latin typeface="Noto Sans KR"/>
+                <a:ea typeface="Noto Sans KR"/>
+                <a:cs typeface="Noto Sans KR"/>
+              </a:rPr>
+              <a:t> · AI 도서 추천</a:t>
             </a:r>
           </a:p>
         </p:txBody>
@@ -29157,7 +29327,18 @@
                 <a:ea typeface="Noto Sans KR"/>
                 <a:cs typeface="Noto Sans KR"/>
               </a:rPr>
-              <a:t>TECHNICAL EVIDENCE · AI 도서 추천</a:t>
+              <a:t>APPENDIX</a:t>
+            </a:r>
+            <a:r>
+              <a:rPr sz="1350" b="1">
+                <a:solidFill>
+                  <a:srgbClr val="F7B95B"/>
+                </a:solidFill>
+                <a:latin typeface="Noto Sans KR"/>
+                <a:ea typeface="Noto Sans KR"/>
+                <a:cs typeface="Noto Sans KR"/>
+              </a:rPr>
+              <a:t> · AI 도서 추천</a:t>
             </a:r>
           </a:p>
         </p:txBody>
